--- a/Team_16_PaperRex_Presentation.pptx
+++ b/Team_16_PaperRex_Presentation.pptx
@@ -748,7 +748,7 @@
         <p:spPr>
           <a:xfrm>
             <a:off x="381300" y="685800"/>
-            <a:ext cx="6096075" cy="3429000"/>
+            <a:ext cx="6096000" cy="3429000"/>
           </a:xfrm>
           <a:custGeom>
             <a:rect b="b" l="l" r="r" t="t"/>
@@ -895,32 +895,8 @@
           <a:lstStyle/>
           <a:p>
             <a:pPr indent="0" lvl="0" marL="0" rtl="0" algn="l">
-              <a:lnSpc>
-                <a:spcPct val="115000"/>
-              </a:lnSpc>
-              <a:spcBef>
-                <a:spcPts val="1200"/>
-              </a:spcBef>
-              <a:spcAft>
-                <a:spcPts val="0"/>
-              </a:spcAft>
-              <a:buClr>
-                <a:schemeClr val="dk1"/>
-              </a:buClr>
-              <a:buSzPts val="1100"/>
-              <a:buFont typeface="Arial"/>
-              <a:buNone/>
-            </a:pPr>
-            <a:r>
-              <a:rPr lang="en"/>
-              <a:t>We evaluated the system using both optimization and systems metrics. Training loss and validation loss show convergence. Perplexity translates validation loss into a standard language-modeling metric. Token accuracy gives exact next-token correctness, though it is strict. The most important fairness metric is the client validation loss gap, which measures disparity across clients. Communication cost and runtime capture system efficiency. </a:t>
-            </a:r>
-            <a:endParaRPr/>
-          </a:p>
-          <a:p>
-            <a:pPr indent="0" lvl="0" marL="0" rtl="0" algn="l">
-              <a:spcBef>
-                <a:spcPts val="1200"/>
+              <a:spcBef>
+                <a:spcPts val="0"/>
               </a:spcBef>
               <a:spcAft>
                 <a:spcPts val="0"/>
@@ -1027,8 +1003,7 @@
               <a:buNone/>
             </a:pPr>
             <a:r>
-              <a:rPr lang="en"/>
-              <a:t>This table summarizes the final outcomes across all four experiments. The IID baseline has the best validation loss and the smallest fairness gap. The non-IID baseline has lower training loss but clearly worse fairness and slightly worse validation performance. Increasing client fraction improves token accuracy and fairness relative to non-IID. More rounds gives the lowest training loss and the highest token accuracy, but validation performance does not improve proportionally, showing diminishing returns.</a:t>
+              <a:t/>
             </a:r>
             <a:endParaRPr/>
           </a:p>
@@ -1127,8 +1102,7 @@
               <a:buNone/>
             </a:pPr>
             <a:r>
-              <a:rPr lang="en"/>
-              <a:t>This plot shows the classic federated learning behavior under non-IID conditions. Training loss steadily decreases, which means local optimization is working. But validation loss is not monotonic; it drops initially and then oscillates. The paper interprets this as client drift, where local models overfit to their own data distributions and aggregation does not always produce equally strong global generalization. </a:t>
+              <a:t/>
             </a:r>
             <a:endParaRPr/>
           </a:p>
@@ -1218,32 +1192,8 @@
           <a:lstStyle/>
           <a:p>
             <a:pPr indent="0" lvl="0" marL="0" rtl="0" algn="l">
-              <a:lnSpc>
-                <a:spcPct val="115000"/>
-              </a:lnSpc>
-              <a:spcBef>
-                <a:spcPts val="1200"/>
-              </a:spcBef>
-              <a:spcAft>
-                <a:spcPts val="0"/>
-              </a:spcAft>
-              <a:buClr>
-                <a:schemeClr val="dk1"/>
-              </a:buClr>
-              <a:buSzPts val="1100"/>
-              <a:buFont typeface="Arial"/>
-              <a:buNone/>
-            </a:pPr>
-            <a:r>
-              <a:rPr lang="en"/>
-              <a:t>Perplexity is the exponential of validation loss, so it mirrors the same pattern. The main takeaway here is that better local optimization does not automatically translate into better global language-modeling quality. This is why simply increasing rounds is not always enough in federated settings, especially with heterogeneous data.</a:t>
-            </a:r>
-            <a:endParaRPr/>
-          </a:p>
-          <a:p>
-            <a:pPr indent="0" lvl="0" marL="0" rtl="0" algn="l">
-              <a:spcBef>
-                <a:spcPts val="1200"/>
+              <a:spcBef>
+                <a:spcPts val="0"/>
               </a:spcBef>
               <a:spcAft>
                 <a:spcPts val="0"/>
@@ -1341,32 +1291,8 @@
           <a:lstStyle/>
           <a:p>
             <a:pPr indent="0" lvl="0" marL="0" rtl="0" algn="l">
-              <a:lnSpc>
-                <a:spcPct val="115000"/>
-              </a:lnSpc>
-              <a:spcBef>
-                <a:spcPts val="1200"/>
-              </a:spcBef>
-              <a:spcAft>
-                <a:spcPts val="0"/>
-              </a:spcAft>
-              <a:buClr>
-                <a:schemeClr val="dk1"/>
-              </a:buClr>
-              <a:buSzPts val="1100"/>
-              <a:buFont typeface="Arial"/>
-              <a:buNone/>
-            </a:pPr>
-            <a:r>
-              <a:rPr lang="en"/>
-              <a:t>This is one of the strongest plots in the presentation. The fairness gap falls sharply in the early rounds, which suggests that federated aggregation helps weaker or smaller clients benefit from the collective model. However, the rebound in the final round shows that fairness remains sensitive to which clients are selected and how heterogeneous their data is. The paper explicitly points to fairness-aware client selection as a possible next step.</a:t>
-            </a:r>
-            <a:endParaRPr/>
-          </a:p>
-          <a:p>
-            <a:pPr indent="0" lvl="0" marL="0" rtl="0" algn="l">
-              <a:spcBef>
-                <a:spcPts val="1200"/>
+              <a:spcBef>
+                <a:spcPts val="0"/>
               </a:spcBef>
               <a:spcAft>
                 <a:spcPts val="0"/>
@@ -1464,32 +1390,8 @@
           <a:lstStyle/>
           <a:p>
             <a:pPr indent="0" lvl="0" marL="0" rtl="0" algn="l">
-              <a:lnSpc>
-                <a:spcPct val="115000"/>
-              </a:lnSpc>
-              <a:spcBef>
-                <a:spcPts val="1200"/>
-              </a:spcBef>
-              <a:spcAft>
-                <a:spcPts val="0"/>
-              </a:spcAft>
-              <a:buClr>
-                <a:schemeClr val="dk1"/>
-              </a:buClr>
-              <a:buSzPts val="1100"/>
-              <a:buFont typeface="Arial"/>
-              <a:buNone/>
-            </a:pPr>
-            <a:r>
-              <a:rPr lang="en"/>
-              <a:t>Token accuracy is low in absolute terms, but that is expected. It measures exact next-token matches, which is a very strict metric for instruction tuning because many different responses can still be valid. That is why the paper treats token accuracy as informative but not sufficient, and suggests future evaluation with ROUGE, BLEU, or judge-based methods.</a:t>
-            </a:r>
-            <a:endParaRPr/>
-          </a:p>
-          <a:p>
-            <a:pPr indent="0" lvl="0" marL="0" rtl="0" algn="l">
-              <a:spcBef>
-                <a:spcPts val="1200"/>
+              <a:spcBef>
+                <a:spcPts val="0"/>
               </a:spcBef>
               <a:spcAft>
                 <a:spcPts val="0"/>
@@ -1596,8 +1498,7 @@
               <a:buNone/>
             </a:pPr>
             <a:r>
-              <a:rPr lang="en"/>
-              <a:t>This slide captures the main systems contribution. By transmitting only LoRA adapters, each round costs about 94.4 MB instead of around 10.8 GB for full FP32 model transmission. Over six rounds, that becomes 566.2 MB instead of 64.8 GB. This 114-times reduction is the clearest evidence that parameter-efficient federated LLM fine-tuning is practical from a communication perspective.</a:t>
+              <a:t/>
             </a:r>
             <a:endParaRPr/>
           </a:p>
@@ -1696,8 +1597,7 @@
               <a:buNone/>
             </a:pPr>
             <a:r>
-              <a:rPr lang="en"/>
-              <a:t>This slide compares the experimental knobs directly. First, non-IID data is the main source of fairness degradation. Second, increasing the client fraction helps because the server sees a more representative sample of the heterogeneous data. Third, adding more rounds improves optimization but shows diminishing returns for generalization, while increasing communication cost significantly. These are the main design tradeoffs that emerged from the study.</a:t>
+              <a:t/>
             </a:r>
             <a:endParaRPr/>
           </a:p>
@@ -1796,8 +1696,7 @@
               <a:buNone/>
             </a:pPr>
             <a:r>
-              <a:rPr lang="en"/>
-              <a:t>The main practical takeaway is that LoRA and QLoRA shift the bottleneck away from communication and toward client-side compute. Even though communication is much more manageable, each client still needs enough memory and compute to load the quantized base model and train adapters. The main limitations are dataset size, number of rounds, and the strictness of token accuracy. Future work should explore more robust aggregation methods, personalized adapters, larger datasets, and richer evaluation metrics.</a:t>
+              <a:t/>
             </a:r>
             <a:endParaRPr/>
           </a:p>
@@ -1986,32 +1885,8 @@
           <a:lstStyle/>
           <a:p>
             <a:pPr indent="0" lvl="0" marL="0" rtl="0" algn="l">
-              <a:lnSpc>
-                <a:spcPct val="115000"/>
-              </a:lnSpc>
-              <a:spcBef>
-                <a:spcPts val="1200"/>
-              </a:spcBef>
-              <a:spcAft>
-                <a:spcPts val="0"/>
-              </a:spcAft>
-              <a:buClr>
-                <a:schemeClr val="dk1"/>
-              </a:buClr>
-              <a:buSzPts val="1100"/>
-              <a:buFont typeface="Arial"/>
-              <a:buNone/>
-            </a:pPr>
-            <a:r>
-              <a:rPr lang="en"/>
-              <a:t>Good [morning/afternoon]. Our project is on federated fine-tuning of large language models using LoRA adapters in a Flower-based simulation. The goal was to study whether we can adapt a large model in a privacy-preserving way while keeping communication and memory costs manageable.</a:t>
-            </a:r>
-            <a:endParaRPr/>
-          </a:p>
-          <a:p>
-            <a:pPr indent="0" lvl="0" marL="0" rtl="0" algn="l">
-              <a:spcBef>
-                <a:spcPts val="1200"/>
+              <a:spcBef>
+                <a:spcPts val="0"/>
               </a:spcBef>
               <a:spcAft>
                 <a:spcPts val="0"/>
@@ -2109,32 +1984,8 @@
           <a:lstStyle/>
           <a:p>
             <a:pPr indent="0" lvl="0" marL="0" rtl="0" algn="l">
-              <a:lnSpc>
-                <a:spcPct val="115000"/>
-              </a:lnSpc>
-              <a:spcBef>
-                <a:spcPts val="1200"/>
-              </a:spcBef>
-              <a:spcAft>
-                <a:spcPts val="0"/>
-              </a:spcAft>
-              <a:buClr>
-                <a:schemeClr val="dk1"/>
-              </a:buClr>
-              <a:buSzPts val="1100"/>
-              <a:buFont typeface="Arial"/>
-              <a:buNone/>
-            </a:pPr>
-            <a:r>
-              <a:rPr lang="en"/>
-              <a:t>The motivation for this work is the tension between model personalization and privacy. LLMs need task-specific fine-tuning, but in many real-world domains we cannot centralize the data. Federated learning helps by sending model updates instead of raw data. The issue is that LLMs are extremely large, so both transmitting and training full weights are expensive. That is why we combine federated learning with parameter-efficient tuning.</a:t>
-            </a:r>
-            <a:endParaRPr/>
-          </a:p>
-          <a:p>
-            <a:pPr indent="0" lvl="0" marL="0" rtl="0" algn="l">
-              <a:spcBef>
-                <a:spcPts val="1200"/>
+              <a:spcBef>
+                <a:spcPts val="0"/>
               </a:spcBef>
               <a:spcAft>
                 <a:spcPts val="0"/>
@@ -2241,8 +2092,7 @@
               <a:buNone/>
             </a:pPr>
             <a:r>
-              <a:rPr lang="en"/>
-              <a:t>This slide shows the basic federated learning workflow. The server chooses a subset of clients, sends them the current global parameters, each client performs local training, and the server aggregates the updates. In our case, the aggregation algorithm is FedAvg with sample-count-proportional weighting. This architecture is exactly how our Flower simulation is organized.</a:t>
+              <a:t/>
             </a:r>
             <a:endParaRPr/>
           </a:p>
@@ -2341,8 +2191,7 @@
               <a:buNone/>
             </a:pPr>
             <a:r>
-              <a:rPr lang="en"/>
-              <a:t>LoRA is the key enabler here. Rather than updating all transformer weights, it inserts low-rank trainable matrices into selected layers. This dramatically reduces the number of trainable parameters. QLoRA goes one step further by loading the base model in 4-bit form, which reduces GPU memory requirements and makes a 2.7B model feasible in Colab-scale hardware. The paper explains this as a reduction from O(d2)O(d^2)O(d2) trainable parameters to O(2dr)O(2dr)O(2dr) for the adapted matrices. </a:t>
+              <a:t/>
             </a:r>
             <a:endParaRPr/>
           </a:p>
@@ -2441,8 +2290,7 @@
               <a:buNone/>
             </a:pPr>
             <a:r>
-              <a:rPr lang="en"/>
-              <a:t>This is the notebook-level workflow. We first format instruction tuning examples, then partition them into client datasets. Next, we load the quantized base model, attach LoRA adapters, and use Flower’s simulation API to run the federated rounds. Each selected client trains on its local partition, and only the LoRA adapter weights are sent back for aggregation. This keeps the process much lighter than federating the full model.</a:t>
+              <a:t/>
             </a:r>
             <a:endParaRPr/>
           </a:p>
@@ -2541,8 +2389,7 @@
               <a:buNone/>
             </a:pPr>
             <a:r>
-              <a:rPr lang="en"/>
-              <a:t>We use Phi-2 as the base LLM. The model is 2.7 billion parameters, but the trainable LoRA portion is only about 11.8 million parameters, which is 0.42% of the full model. LoRA is applied to the main attention projection layers. This is one of the most important design choices, because it makes communication-efficient federated fine-tuning feasible. </a:t>
+              <a:t/>
             </a:r>
             <a:endParaRPr/>
           </a:p>
@@ -2641,8 +2488,7 @@
               <a:buNone/>
             </a:pPr>
             <a:r>
-              <a:rPr lang="en"/>
-              <a:t>For the dataset, we used Alpaca-GPT4 and subsampled 800 training and 200 validation examples for feasibility. We then created 8 simulated clients. In the IID setting, the data is randomly distributed. In the non-IID setting, we intentionally introduced semantic imbalance by grouping data into short responses, long responses, and code-related tasks. This creates a more realistic heterogeneity pattern.</a:t>
+              <a:t/>
             </a:r>
             <a:endParaRPr/>
           </a:p>
@@ -2732,32 +2578,8 @@
           <a:lstStyle/>
           <a:p>
             <a:pPr indent="0" lvl="0" marL="0" rtl="0" algn="l">
-              <a:lnSpc>
-                <a:spcPct val="115000"/>
-              </a:lnSpc>
-              <a:spcBef>
-                <a:spcPts val="1200"/>
-              </a:spcBef>
-              <a:spcAft>
-                <a:spcPts val="0"/>
-              </a:spcAft>
-              <a:buClr>
-                <a:schemeClr val="dk1"/>
-              </a:buClr>
-              <a:buSzPts val="1100"/>
-              <a:buFont typeface="Arial"/>
-              <a:buNone/>
-            </a:pPr>
-            <a:r>
-              <a:rPr lang="en"/>
-              <a:t>These are the four main experimental configurations. The IID baseline is our reference point. The non-IID baseline isolates the effect of data heterogeneity. The high-client-fraction experiment checks whether broader participation helps represent the global data distribution better. And the more-rounds experiment checks whether additional communication can compensate for heterogeneity. </a:t>
-            </a:r>
-            <a:endParaRPr/>
-          </a:p>
-          <a:p>
-            <a:pPr indent="0" lvl="0" marL="0" rtl="0" algn="l">
-              <a:spcBef>
-                <a:spcPts val="1200"/>
+              <a:spcBef>
+                <a:spcPts val="0"/>
               </a:spcBef>
               <a:spcAft>
                 <a:spcPts val="0"/>
@@ -9157,7 +8979,7 @@
             </a:pPr>
             <a:r>
               <a:rPr lang="en"/>
-              <a:t>By Team 16: Krish Patel and Ayush Patel</a:t>
+              <a:t>By Team 16: Krish Patel and Ayush Alpesh Gupta</a:t>
             </a:r>
             <a:endParaRPr/>
           </a:p>
@@ -9349,7 +9171,31 @@
                 <a:cs typeface="Raleway"/>
                 <a:sym typeface="Raleway"/>
               </a:rPr>
-              <a:t>Perplexity =exp⁡(Lval)= \exp(L_{val})=exp(Lval​)</a:t>
+              <a:t>Perplexity = exp⁡(L</a:t>
+            </a:r>
+            <a:r>
+              <a:rPr lang="en" sz="4400">
+                <a:solidFill>
+                  <a:srgbClr val="000000"/>
+                </a:solidFill>
+                <a:latin typeface="Raleway"/>
+                <a:ea typeface="Raleway"/>
+                <a:cs typeface="Raleway"/>
+                <a:sym typeface="Raleway"/>
+              </a:rPr>
+              <a:t>val</a:t>
+            </a:r>
+            <a:r>
+              <a:rPr lang="en" sz="6000">
+                <a:solidFill>
+                  <a:srgbClr val="000000"/>
+                </a:solidFill>
+                <a:latin typeface="Raleway"/>
+                <a:ea typeface="Raleway"/>
+                <a:cs typeface="Raleway"/>
+                <a:sym typeface="Raleway"/>
+              </a:rPr>
+              <a:t>)</a:t>
             </a:r>
             <a:endParaRPr sz="6000">
               <a:solidFill>
@@ -9809,7 +9655,7 @@
         </p:spPr>
         <p:txBody>
           <a:bodyPr anchorCtr="0" anchor="t" bIns="91425" lIns="91425" spcFirstLastPara="1" rIns="91425" wrap="square" tIns="91425">
-            <a:normAutofit fontScale="85000"/>
+            <a:normAutofit fontScale="77500" lnSpcReduction="20000"/>
           </a:bodyPr>
           <a:lstStyle/>
           <a:p>
@@ -9823,7 +9669,7 @@
               <a:buNone/>
             </a:pPr>
             <a:r>
-              <a:rPr b="1" lang="en" sz="1500">
+              <a:rPr b="1" lang="en" sz="1750">
                 <a:solidFill>
                   <a:srgbClr val="000000"/>
                 </a:solidFill>
@@ -9834,7 +9680,7 @@
               </a:rPr>
               <a:t>Key observations</a:t>
             </a:r>
-            <a:endParaRPr b="1" sz="1500">
+            <a:endParaRPr b="1" sz="1750">
               <a:solidFill>
                 <a:srgbClr val="000000"/>
               </a:solidFill>
@@ -9845,7 +9691,7 @@
             </a:endParaRPr>
           </a:p>
           <a:p>
-            <a:pPr indent="-309562" lvl="0" marL="457200" rtl="0" algn="l">
+            <a:pPr indent="-314721" lvl="0" marL="457200" rtl="0" algn="l">
               <a:spcBef>
                 <a:spcPts val="1200"/>
               </a:spcBef>
@@ -9860,7 +9706,7 @@
               <a:buChar char="●"/>
             </a:pPr>
             <a:r>
-              <a:rPr lang="en" sz="1500">
+              <a:rPr lang="en" sz="1750">
                 <a:solidFill>
                   <a:srgbClr val="000000"/>
                 </a:solidFill>
@@ -9872,7 +9718,7 @@
               <a:t>Training loss drops from </a:t>
             </a:r>
             <a:r>
-              <a:rPr b="1" lang="en" sz="1500">
+              <a:rPr b="1" lang="en" sz="1750">
                 <a:solidFill>
                   <a:srgbClr val="000000"/>
                 </a:solidFill>
@@ -9883,7 +9729,7 @@
               </a:rPr>
               <a:t>1.085 to 0.866</a:t>
             </a:r>
-            <a:endParaRPr b="1" sz="1500">
+            <a:endParaRPr b="1" sz="1750">
               <a:solidFill>
                 <a:srgbClr val="000000"/>
               </a:solidFill>
@@ -9894,7 +9740,7 @@
             </a:endParaRPr>
           </a:p>
           <a:p>
-            <a:pPr indent="-309562" lvl="0" marL="457200" rtl="0" algn="l">
+            <a:pPr indent="-314721" lvl="0" marL="457200" rtl="0" algn="l">
               <a:spcBef>
                 <a:spcPts val="0"/>
               </a:spcBef>
@@ -9909,7 +9755,7 @@
               <a:buChar char="●"/>
             </a:pPr>
             <a:r>
-              <a:rPr lang="en" sz="1500">
+              <a:rPr lang="en" sz="1750">
                 <a:solidFill>
                   <a:srgbClr val="000000"/>
                 </a:solidFill>
@@ -9920,7 +9766,7 @@
               </a:rPr>
               <a:t>Validation loss decreases first, then oscillates</a:t>
             </a:r>
-            <a:endParaRPr sz="1500">
+            <a:endParaRPr sz="1750">
               <a:solidFill>
                 <a:srgbClr val="000000"/>
               </a:solidFill>
@@ -9931,7 +9777,7 @@
             </a:endParaRPr>
           </a:p>
           <a:p>
-            <a:pPr indent="-309562" lvl="0" marL="457200" rtl="0" algn="l">
+            <a:pPr indent="-314721" lvl="0" marL="457200" rtl="0" algn="l">
               <a:spcBef>
                 <a:spcPts val="0"/>
               </a:spcBef>
@@ -9946,7 +9792,7 @@
               <a:buChar char="●"/>
             </a:pPr>
             <a:r>
-              <a:rPr lang="en" sz="1500">
+              <a:rPr lang="en" sz="1750">
                 <a:solidFill>
                   <a:srgbClr val="000000"/>
                 </a:solidFill>
@@ -9957,7 +9803,7 @@
               </a:rPr>
               <a:t>Best validation region occurs early, then rises again</a:t>
             </a:r>
-            <a:endParaRPr sz="1500">
+            <a:endParaRPr sz="1750">
               <a:solidFill>
                 <a:srgbClr val="000000"/>
               </a:solidFill>
@@ -9968,7 +9814,7 @@
             </a:endParaRPr>
           </a:p>
           <a:p>
-            <a:pPr indent="-309562" lvl="0" marL="457200" rtl="0" algn="l">
+            <a:pPr indent="-314721" lvl="0" marL="457200" rtl="0" algn="l">
               <a:spcBef>
                 <a:spcPts val="0"/>
               </a:spcBef>
@@ -9983,7 +9829,7 @@
               <a:buChar char="●"/>
             </a:pPr>
             <a:r>
-              <a:rPr lang="en" sz="1500">
+              <a:rPr lang="en" sz="1750">
                 <a:solidFill>
                   <a:srgbClr val="000000"/>
                 </a:solidFill>
@@ -9995,7 +9841,7 @@
               <a:t>Indicates </a:t>
             </a:r>
             <a:r>
-              <a:rPr b="1" lang="en" sz="1500">
+              <a:rPr b="1" lang="en" sz="1750">
                 <a:solidFill>
                   <a:srgbClr val="000000"/>
                 </a:solidFill>
@@ -10007,7 +9853,7 @@
               <a:t>client drift</a:t>
             </a:r>
             <a:r>
-              <a:rPr lang="en" sz="1500">
+              <a:rPr lang="en" sz="1750">
                 <a:solidFill>
                   <a:srgbClr val="000000"/>
                 </a:solidFill>
@@ -10018,7 +9864,7 @@
               </a:rPr>
               <a:t> under heterogeneous local training</a:t>
             </a:r>
-            <a:endParaRPr sz="1500">
+            <a:endParaRPr sz="1750">
               <a:solidFill>
                 <a:srgbClr val="000000"/>
               </a:solidFill>
@@ -10481,7 +10327,7 @@
         </p:spPr>
         <p:txBody>
           <a:bodyPr anchorCtr="0" anchor="t" bIns="91425" lIns="91425" spcFirstLastPara="1" rIns="91425" wrap="square" tIns="91425">
-            <a:normAutofit fontScale="85000" lnSpcReduction="20000"/>
+            <a:normAutofit fontScale="77500" lnSpcReduction="20000"/>
           </a:bodyPr>
           <a:lstStyle/>
           <a:p>
@@ -10495,7 +10341,7 @@
               <a:buNone/>
             </a:pPr>
             <a:r>
-              <a:rPr b="1" lang="en" sz="1500">
+              <a:rPr b="1" lang="en" sz="1750">
                 <a:solidFill>
                   <a:srgbClr val="000000"/>
                 </a:solidFill>
@@ -10506,7 +10352,7 @@
               </a:rPr>
               <a:t>Key observations</a:t>
             </a:r>
-            <a:endParaRPr b="1" sz="1500">
+            <a:endParaRPr b="1" sz="1750">
               <a:solidFill>
                 <a:srgbClr val="000000"/>
               </a:solidFill>
@@ -10517,7 +10363,7 @@
             </a:endParaRPr>
           </a:p>
           <a:p>
-            <a:pPr indent="-309562" lvl="0" marL="457200" rtl="0" algn="l">
+            <a:pPr indent="-314721" lvl="0" marL="457200" rtl="0" algn="l">
               <a:spcBef>
                 <a:spcPts val="1200"/>
               </a:spcBef>
@@ -10532,7 +10378,7 @@
               <a:buChar char="●"/>
             </a:pPr>
             <a:r>
-              <a:rPr lang="en" sz="1500">
+              <a:rPr lang="en" sz="1750">
                 <a:solidFill>
                   <a:srgbClr val="000000"/>
                 </a:solidFill>
@@ -10544,7 +10390,7 @@
               <a:t>Client loss gap drops from </a:t>
             </a:r>
             <a:r>
-              <a:rPr b="1" lang="en" sz="1500">
+              <a:rPr b="1" lang="en" sz="1750">
                 <a:solidFill>
                   <a:srgbClr val="000000"/>
                 </a:solidFill>
@@ -10556,7 +10402,7 @@
               <a:t>0.787 to 0.116</a:t>
             </a:r>
             <a:r>
-              <a:rPr lang="en" sz="1500">
+              <a:rPr lang="en" sz="1750">
                 <a:solidFill>
                   <a:srgbClr val="000000"/>
                 </a:solidFill>
@@ -10567,7 +10413,7 @@
               </a:rPr>
               <a:t> by round 5</a:t>
             </a:r>
-            <a:endParaRPr sz="1500">
+            <a:endParaRPr sz="1750">
               <a:solidFill>
                 <a:srgbClr val="000000"/>
               </a:solidFill>
@@ -10578,7 +10424,7 @@
             </a:endParaRPr>
           </a:p>
           <a:p>
-            <a:pPr indent="-309562" lvl="0" marL="457200" rtl="0" algn="l">
+            <a:pPr indent="-314721" lvl="0" marL="457200" rtl="0" algn="l">
               <a:spcBef>
                 <a:spcPts val="0"/>
               </a:spcBef>
@@ -10593,7 +10439,7 @@
               <a:buChar char="●"/>
             </a:pPr>
             <a:r>
-              <a:rPr lang="en" sz="1500">
+              <a:rPr lang="en" sz="1750">
                 <a:solidFill>
                   <a:srgbClr val="000000"/>
                 </a:solidFill>
@@ -10605,7 +10451,7 @@
               <a:t>Slight rebound to </a:t>
             </a:r>
             <a:r>
-              <a:rPr b="1" lang="en" sz="1500">
+              <a:rPr b="1" lang="en" sz="1750">
                 <a:solidFill>
                   <a:srgbClr val="000000"/>
                 </a:solidFill>
@@ -10617,7 +10463,7 @@
               <a:t>0.223</a:t>
             </a:r>
             <a:r>
-              <a:rPr lang="en" sz="1500">
+              <a:rPr lang="en" sz="1750">
                 <a:solidFill>
                   <a:srgbClr val="000000"/>
                 </a:solidFill>
@@ -10628,7 +10474,7 @@
               </a:rPr>
               <a:t> in round 6</a:t>
             </a:r>
-            <a:endParaRPr sz="1500">
+            <a:endParaRPr sz="1750">
               <a:solidFill>
                 <a:srgbClr val="000000"/>
               </a:solidFill>
@@ -10639,7 +10485,7 @@
             </a:endParaRPr>
           </a:p>
           <a:p>
-            <a:pPr indent="-309562" lvl="0" marL="457200" rtl="0" algn="l">
+            <a:pPr indent="-314721" lvl="0" marL="457200" rtl="0" algn="l">
               <a:spcBef>
                 <a:spcPts val="0"/>
               </a:spcBef>
@@ -10654,7 +10500,7 @@
               <a:buChar char="●"/>
             </a:pPr>
             <a:r>
-              <a:rPr lang="en" sz="1500">
+              <a:rPr lang="en" sz="1750">
                 <a:solidFill>
                   <a:srgbClr val="000000"/>
                 </a:solidFill>
@@ -10665,7 +10511,7 @@
               </a:rPr>
               <a:t>FedAvg helps distribute knowledge across clients</a:t>
             </a:r>
-            <a:endParaRPr sz="1500">
+            <a:endParaRPr sz="1750">
               <a:solidFill>
                 <a:srgbClr val="000000"/>
               </a:solidFill>
@@ -10676,7 +10522,7 @@
             </a:endParaRPr>
           </a:p>
           <a:p>
-            <a:pPr indent="-309562" lvl="0" marL="457200" rtl="0" algn="l">
+            <a:pPr indent="-314721" lvl="0" marL="457200" rtl="0" algn="l">
               <a:spcBef>
                 <a:spcPts val="0"/>
               </a:spcBef>
@@ -10691,7 +10537,7 @@
               <a:buChar char="●"/>
             </a:pPr>
             <a:r>
-              <a:rPr lang="en" sz="1500">
+              <a:rPr lang="en" sz="1750">
                 <a:solidFill>
                   <a:srgbClr val="000000"/>
                 </a:solidFill>
@@ -10702,7 +10548,7 @@
               </a:rPr>
               <a:t>But fairness is not monotonic and depends on sampling</a:t>
             </a:r>
-            <a:endParaRPr sz="1500">
+            <a:endParaRPr sz="1750">
               <a:solidFill>
                 <a:srgbClr val="000000"/>
               </a:solidFill>
@@ -10832,8 +10678,8 @@
         </p:nvSpPr>
         <p:spPr>
           <a:xfrm>
-            <a:off x="729450" y="2078875"/>
-            <a:ext cx="4065300" cy="2261100"/>
+            <a:off x="729450" y="1916050"/>
+            <a:ext cx="4065300" cy="3012900"/>
           </a:xfrm>
           <a:prstGeom prst="rect">
             <a:avLst/>
@@ -11201,7 +11047,7 @@
         </p:spPr>
         <p:txBody>
           <a:bodyPr anchorCtr="0" anchor="t" bIns="91425" lIns="91425" spcFirstLastPara="1" rIns="91425" wrap="square" tIns="91425">
-            <a:normAutofit lnSpcReduction="20000"/>
+            <a:normAutofit fontScale="25000" lnSpcReduction="20000"/>
           </a:bodyPr>
           <a:lstStyle/>
           <a:p>
@@ -11215,7 +11061,7 @@
               <a:buNone/>
             </a:pPr>
             <a:r>
-              <a:rPr b="1" lang="en" sz="1500">
+              <a:rPr b="1" lang="en" sz="6000">
                 <a:solidFill>
                   <a:srgbClr val="000000"/>
                 </a:solidFill>
@@ -11226,7 +11072,7 @@
               </a:rPr>
               <a:t>Key observations</a:t>
             </a:r>
-            <a:endParaRPr b="1" sz="1500">
+            <a:endParaRPr b="1" sz="6000">
               <a:solidFill>
                 <a:srgbClr val="000000"/>
               </a:solidFill>
@@ -11247,12 +11093,12 @@
               <a:buClr>
                 <a:srgbClr val="000000"/>
               </a:buClr>
-              <a:buSzPts val="1500"/>
+              <a:buSzPct val="100000"/>
               <a:buFont typeface="Arial"/>
               <a:buChar char="●"/>
             </a:pPr>
             <a:r>
-              <a:rPr lang="en" sz="1500">
+              <a:rPr lang="en" sz="6000">
                 <a:solidFill>
                   <a:srgbClr val="000000"/>
                 </a:solidFill>
@@ -11261,10 +11107,10 @@
                 <a:cs typeface="Raleway"/>
                 <a:sym typeface="Raleway"/>
               </a:rPr>
-              <a:t>About </a:t>
-            </a:r>
-            <a:r>
-              <a:rPr b="1" lang="en" sz="1500">
+              <a:t>Communication grows </a:t>
+            </a:r>
+            <a:r>
+              <a:rPr b="1" lang="en" sz="6000">
                 <a:solidFill>
                   <a:srgbClr val="000000"/>
                 </a:solidFill>
@@ -11273,9 +11119,9 @@
                 <a:cs typeface="Raleway"/>
                 <a:sym typeface="Raleway"/>
               </a:rPr>
-              <a:t>94.4 MB per round</a:t>
-            </a:r>
-            <a:endParaRPr b="1" sz="1500">
+              <a:t>linearly with rounds</a:t>
+            </a:r>
+            <a:endParaRPr b="1" sz="6000">
               <a:solidFill>
                 <a:srgbClr val="000000"/>
               </a:solidFill>
@@ -11296,12 +11142,12 @@
               <a:buClr>
                 <a:srgbClr val="000000"/>
               </a:buClr>
-              <a:buSzPts val="1500"/>
-              <a:buFont typeface="Arial"/>
+              <a:buSzPct val="100000"/>
+              <a:buFont typeface="Raleway"/>
               <a:buChar char="●"/>
             </a:pPr>
             <a:r>
-              <a:rPr b="1" lang="en" sz="1500">
+              <a:rPr lang="en" sz="6000">
                 <a:solidFill>
                   <a:srgbClr val="000000"/>
                 </a:solidFill>
@@ -11310,21 +11156,9 @@
                 <a:cs typeface="Raleway"/>
                 <a:sym typeface="Raleway"/>
               </a:rPr>
-              <a:t>566.2 MB</a:t>
-            </a:r>
-            <a:r>
-              <a:rPr lang="en" sz="1500">
-                <a:solidFill>
-                  <a:srgbClr val="000000"/>
-                </a:solidFill>
-                <a:latin typeface="Raleway"/>
-                <a:ea typeface="Raleway"/>
-                <a:cs typeface="Raleway"/>
-                <a:sym typeface="Raleway"/>
-              </a:rPr>
-              <a:t> over 6 rounds</a:t>
-            </a:r>
-            <a:endParaRPr sz="1500">
+              <a:t>Each round costs ~94 MB</a:t>
+            </a:r>
+            <a:endParaRPr sz="6000">
               <a:solidFill>
                 <a:srgbClr val="000000"/>
               </a:solidFill>
@@ -11345,12 +11179,12 @@
               <a:buClr>
                 <a:srgbClr val="000000"/>
               </a:buClr>
-              <a:buSzPts val="1500"/>
-              <a:buFont typeface="Arial"/>
+              <a:buSzPct val="100000"/>
+              <a:buFont typeface="Raleway"/>
               <a:buChar char="●"/>
             </a:pPr>
             <a:r>
-              <a:rPr lang="en" sz="1500">
+              <a:rPr lang="en" sz="6000">
                 <a:solidFill>
                   <a:srgbClr val="000000"/>
                 </a:solidFill>
@@ -11359,21 +11193,9 @@
                 <a:cs typeface="Raleway"/>
                 <a:sym typeface="Raleway"/>
               </a:rPr>
-              <a:t>Full Phi-2 in FP32 would be about </a:t>
-            </a:r>
-            <a:r>
-              <a:rPr b="1" lang="en" sz="1500">
-                <a:solidFill>
-                  <a:srgbClr val="000000"/>
-                </a:solidFill>
-                <a:latin typeface="Raleway"/>
-                <a:ea typeface="Raleway"/>
-                <a:cs typeface="Raleway"/>
-                <a:sym typeface="Raleway"/>
-              </a:rPr>
-              <a:t>10.8 GB per round</a:t>
-            </a:r>
-            <a:endParaRPr b="1" sz="1500">
+              <a:t>Compared to ~10.8 GB per round for full model</a:t>
+            </a:r>
+            <a:endParaRPr sz="6000">
               <a:solidFill>
                 <a:srgbClr val="000000"/>
               </a:solidFill>
@@ -11394,12 +11216,12 @@
               <a:buClr>
                 <a:srgbClr val="000000"/>
               </a:buClr>
-              <a:buSzPts val="1500"/>
-              <a:buFont typeface="Arial"/>
+              <a:buSzPct val="100000"/>
+              <a:buFont typeface="Raleway"/>
               <a:buChar char="●"/>
             </a:pPr>
             <a:r>
-              <a:rPr lang="en" sz="1500">
+              <a:rPr b="1" lang="en" sz="6000">
                 <a:solidFill>
                   <a:srgbClr val="000000"/>
                 </a:solidFill>
@@ -11408,10 +11230,35 @@
                 <a:cs typeface="Raleway"/>
                 <a:sym typeface="Raleway"/>
               </a:rPr>
-              <a:t>Communication reduction is about </a:t>
-            </a:r>
-            <a:r>
-              <a:rPr b="1" lang="en" sz="1500">
+              <a:t>114× reduction per round</a:t>
+            </a:r>
+            <a:endParaRPr b="1" sz="6000">
+              <a:solidFill>
+                <a:srgbClr val="000000"/>
+              </a:solidFill>
+              <a:latin typeface="Raleway"/>
+              <a:ea typeface="Raleway"/>
+              <a:cs typeface="Raleway"/>
+              <a:sym typeface="Raleway"/>
+            </a:endParaRPr>
+          </a:p>
+          <a:p>
+            <a:pPr indent="-323850" lvl="0" marL="457200" rtl="0" algn="l">
+              <a:spcBef>
+                <a:spcPts val="0"/>
+              </a:spcBef>
+              <a:spcAft>
+                <a:spcPts val="0"/>
+              </a:spcAft>
+              <a:buClr>
+                <a:srgbClr val="000000"/>
+              </a:buClr>
+              <a:buSzPct val="100000"/>
+              <a:buFont typeface="Raleway"/>
+              <a:buChar char="●"/>
+            </a:pPr>
+            <a:r>
+              <a:rPr lang="en" sz="6000">
                 <a:solidFill>
                   <a:srgbClr val="000000"/>
                 </a:solidFill>
@@ -11420,9 +11267,32 @@
                 <a:cs typeface="Raleway"/>
                 <a:sym typeface="Raleway"/>
               </a:rPr>
-              <a:t>114×</a:t>
-            </a:r>
-            <a:endParaRPr b="1" sz="1500">
+              <a:t>Total cost after 6 rounds: ~566 MB </a:t>
+            </a:r>
+            <a:endParaRPr sz="6000">
+              <a:solidFill>
+                <a:srgbClr val="000000"/>
+              </a:solidFill>
+              <a:latin typeface="Raleway"/>
+              <a:ea typeface="Raleway"/>
+              <a:cs typeface="Raleway"/>
+              <a:sym typeface="Raleway"/>
+            </a:endParaRPr>
+          </a:p>
+          <a:p>
+            <a:pPr indent="0" lvl="0" marL="457200" rtl="0" algn="l">
+              <a:spcBef>
+                <a:spcPts val="1200"/>
+              </a:spcBef>
+              <a:spcAft>
+                <a:spcPts val="0"/>
+              </a:spcAft>
+              <a:buNone/>
+            </a:pPr>
+            <a:r>
+              <a:t/>
+            </a:r>
+            <a:endParaRPr sz="1500">
               <a:solidFill>
                 <a:srgbClr val="000000"/>
               </a:solidFill>
@@ -11512,7 +11382,7 @@
         </p:nvSpPr>
         <p:spPr>
           <a:xfrm>
-            <a:off x="727650" y="1264975"/>
+            <a:off x="727650" y="620925"/>
             <a:ext cx="7688700" cy="535200"/>
           </a:xfrm>
           <a:prstGeom prst="rect">
@@ -11552,8 +11422,8 @@
         </p:nvSpPr>
         <p:spPr>
           <a:xfrm>
-            <a:off x="727650" y="1738975"/>
-            <a:ext cx="7688700" cy="2261100"/>
+            <a:off x="727650" y="1354325"/>
+            <a:ext cx="7688700" cy="3646200"/>
           </a:xfrm>
           <a:prstGeom prst="rect">
             <a:avLst/>
@@ -12144,8 +12014,8 @@
         </p:nvSpPr>
         <p:spPr>
           <a:xfrm>
-            <a:off x="727650" y="1147200"/>
-            <a:ext cx="7688700" cy="2261100"/>
+            <a:off x="727650" y="1254550"/>
+            <a:ext cx="7688700" cy="3781500"/>
           </a:xfrm>
           <a:prstGeom prst="rect">
             <a:avLst/>
@@ -12167,7 +12037,7 @@
               <a:buNone/>
             </a:pPr>
             <a:r>
-              <a:rPr b="1" lang="en" sz="6000">
+              <a:rPr b="1" lang="en" sz="5200">
                 <a:solidFill>
                   <a:srgbClr val="000000"/>
                 </a:solidFill>
@@ -12178,7 +12048,7 @@
               </a:rPr>
               <a:t>Practical implications</a:t>
             </a:r>
-            <a:endParaRPr b="1" sz="6000">
+            <a:endParaRPr b="1" sz="5200">
               <a:solidFill>
                 <a:srgbClr val="000000"/>
               </a:solidFill>
@@ -12189,7 +12059,7 @@
             </a:endParaRPr>
           </a:p>
           <a:p>
-            <a:pPr indent="-323850" lvl="0" marL="457200" rtl="0" algn="l">
+            <a:pPr indent="-311150" lvl="0" marL="457200" rtl="0" algn="l">
               <a:spcBef>
                 <a:spcPts val="1200"/>
               </a:spcBef>
@@ -12204,7 +12074,7 @@
               <a:buChar char="●"/>
             </a:pPr>
             <a:r>
-              <a:rPr lang="en" sz="6000">
+              <a:rPr lang="en" sz="5200">
                 <a:solidFill>
                   <a:srgbClr val="000000"/>
                 </a:solidFill>
@@ -12215,7 +12085,7 @@
               </a:rPr>
               <a:t>LoRA + QLoRA makes FL of LLMs feasible</a:t>
             </a:r>
-            <a:endParaRPr sz="6000">
+            <a:endParaRPr sz="5200">
               <a:solidFill>
                 <a:srgbClr val="000000"/>
               </a:solidFill>
@@ -12226,7 +12096,7 @@
             </a:endParaRPr>
           </a:p>
           <a:p>
-            <a:pPr indent="-323850" lvl="0" marL="457200" rtl="0" algn="l">
+            <a:pPr indent="-311150" lvl="0" marL="457200" rtl="0" algn="l">
               <a:spcBef>
                 <a:spcPts val="0"/>
               </a:spcBef>
@@ -12241,7 +12111,7 @@
               <a:buChar char="●"/>
             </a:pPr>
             <a:r>
-              <a:rPr lang="en" sz="6000">
+              <a:rPr lang="en" sz="5200">
                 <a:solidFill>
                   <a:srgbClr val="000000"/>
                 </a:solidFill>
@@ -12252,7 +12122,7 @@
               </a:rPr>
               <a:t>Communication bottleneck is greatly reduced</a:t>
             </a:r>
-            <a:endParaRPr sz="6000">
+            <a:endParaRPr sz="5200">
               <a:solidFill>
                 <a:srgbClr val="000000"/>
               </a:solidFill>
@@ -12263,7 +12133,7 @@
             </a:endParaRPr>
           </a:p>
           <a:p>
-            <a:pPr indent="-323850" lvl="0" marL="457200" rtl="0" algn="l">
+            <a:pPr indent="-311150" lvl="0" marL="457200" rtl="0" algn="l">
               <a:spcBef>
                 <a:spcPts val="0"/>
               </a:spcBef>
@@ -12278,7 +12148,7 @@
               <a:buChar char="●"/>
             </a:pPr>
             <a:r>
-              <a:rPr lang="en" sz="6000">
+              <a:rPr lang="en" sz="5200">
                 <a:solidFill>
                   <a:srgbClr val="000000"/>
                 </a:solidFill>
@@ -12289,7 +12159,7 @@
               </a:rPr>
               <a:t>Compute bottleneck remains on client side</a:t>
             </a:r>
-            <a:endParaRPr sz="6000">
+            <a:endParaRPr sz="5200">
               <a:solidFill>
                 <a:srgbClr val="000000"/>
               </a:solidFill>
@@ -12310,7 +12180,7 @@
               <a:buNone/>
             </a:pPr>
             <a:r>
-              <a:rPr b="1" lang="en" sz="6000">
+              <a:rPr b="1" lang="en" sz="5200">
                 <a:solidFill>
                   <a:srgbClr val="000000"/>
                 </a:solidFill>
@@ -12321,7 +12191,7 @@
               </a:rPr>
               <a:t>Limitations</a:t>
             </a:r>
-            <a:endParaRPr b="1" sz="6000">
+            <a:endParaRPr b="1" sz="5200">
               <a:solidFill>
                 <a:srgbClr val="000000"/>
               </a:solidFill>
@@ -12332,7 +12202,7 @@
             </a:endParaRPr>
           </a:p>
           <a:p>
-            <a:pPr indent="-323850" lvl="0" marL="457200" rtl="0" algn="l">
+            <a:pPr indent="-311150" lvl="0" marL="457200" rtl="0" algn="l">
               <a:spcBef>
                 <a:spcPts val="1200"/>
               </a:spcBef>
@@ -12347,7 +12217,7 @@
               <a:buChar char="●"/>
             </a:pPr>
             <a:r>
-              <a:rPr lang="en" sz="6000">
+              <a:rPr lang="en" sz="5200">
                 <a:solidFill>
                   <a:srgbClr val="000000"/>
                 </a:solidFill>
@@ -12358,7 +12228,7 @@
               </a:rPr>
               <a:t>only 800 train / 200 validation examples</a:t>
             </a:r>
-            <a:endParaRPr sz="6000">
+            <a:endParaRPr sz="5200">
               <a:solidFill>
                 <a:srgbClr val="000000"/>
               </a:solidFill>
@@ -12369,7 +12239,7 @@
             </a:endParaRPr>
           </a:p>
           <a:p>
-            <a:pPr indent="-323850" lvl="0" marL="457200" rtl="0" algn="l">
+            <a:pPr indent="-311150" lvl="0" marL="457200" rtl="0" algn="l">
               <a:spcBef>
                 <a:spcPts val="0"/>
               </a:spcBef>
@@ -12384,7 +12254,7 @@
               <a:buChar char="●"/>
             </a:pPr>
             <a:r>
-              <a:rPr lang="en" sz="6000">
+              <a:rPr lang="en" sz="5200">
                 <a:solidFill>
                   <a:srgbClr val="000000"/>
                 </a:solidFill>
@@ -12395,7 +12265,7 @@
               </a:rPr>
               <a:t>6 to 10 rounds only</a:t>
             </a:r>
-            <a:endParaRPr sz="6000">
+            <a:endParaRPr sz="5200">
               <a:solidFill>
                 <a:srgbClr val="000000"/>
               </a:solidFill>
@@ -12406,7 +12276,7 @@
             </a:endParaRPr>
           </a:p>
           <a:p>
-            <a:pPr indent="-323850" lvl="0" marL="457200" rtl="0" algn="l">
+            <a:pPr indent="-311150" lvl="0" marL="457200" rtl="0" algn="l">
               <a:spcBef>
                 <a:spcPts val="0"/>
               </a:spcBef>
@@ -12421,7 +12291,7 @@
               <a:buChar char="●"/>
             </a:pPr>
             <a:r>
-              <a:rPr lang="en" sz="6000">
+              <a:rPr lang="en" sz="5200">
                 <a:solidFill>
                   <a:srgbClr val="000000"/>
                 </a:solidFill>
@@ -12432,7 +12302,7 @@
               </a:rPr>
               <a:t>single local epoch</a:t>
             </a:r>
-            <a:endParaRPr sz="6000">
+            <a:endParaRPr sz="5200">
               <a:solidFill>
                 <a:srgbClr val="000000"/>
               </a:solidFill>
@@ -12443,7 +12313,7 @@
             </a:endParaRPr>
           </a:p>
           <a:p>
-            <a:pPr indent="-323850" lvl="0" marL="457200" rtl="0" algn="l">
+            <a:pPr indent="-311150" lvl="0" marL="457200" rtl="0" algn="l">
               <a:spcBef>
                 <a:spcPts val="0"/>
               </a:spcBef>
@@ -12458,7 +12328,7 @@
               <a:buChar char="●"/>
             </a:pPr>
             <a:r>
-              <a:rPr lang="en" sz="6000">
+              <a:rPr lang="en" sz="5200">
                 <a:solidFill>
                   <a:srgbClr val="000000"/>
                 </a:solidFill>
@@ -12469,7 +12339,7 @@
               </a:rPr>
               <a:t>token accuracy is limited as a quality metric</a:t>
             </a:r>
-            <a:endParaRPr sz="6000">
+            <a:endParaRPr sz="5200">
               <a:solidFill>
                 <a:srgbClr val="000000"/>
               </a:solidFill>
@@ -12490,7 +12360,7 @@
               <a:buNone/>
             </a:pPr>
             <a:r>
-              <a:rPr b="1" lang="en" sz="6000">
+              <a:rPr b="1" lang="en" sz="5200">
                 <a:solidFill>
                   <a:srgbClr val="000000"/>
                 </a:solidFill>
@@ -12501,7 +12371,7 @@
               </a:rPr>
               <a:t>Future work</a:t>
             </a:r>
-            <a:endParaRPr b="1" sz="6000">
+            <a:endParaRPr b="1" sz="5200">
               <a:solidFill>
                 <a:srgbClr val="000000"/>
               </a:solidFill>
@@ -12512,7 +12382,7 @@
             </a:endParaRPr>
           </a:p>
           <a:p>
-            <a:pPr indent="-323850" lvl="0" marL="457200" rtl="0" algn="l">
+            <a:pPr indent="-311150" lvl="0" marL="457200" rtl="0" algn="l">
               <a:spcBef>
                 <a:spcPts val="1200"/>
               </a:spcBef>
@@ -12527,7 +12397,7 @@
               <a:buChar char="●"/>
             </a:pPr>
             <a:r>
-              <a:rPr lang="en" sz="6000">
+              <a:rPr lang="en" sz="5200">
                 <a:solidFill>
                   <a:srgbClr val="000000"/>
                 </a:solidFill>
@@ -12538,7 +12408,7 @@
               </a:rPr>
               <a:t>FedProx / SCAFFOLD</a:t>
             </a:r>
-            <a:endParaRPr sz="6000">
+            <a:endParaRPr sz="5200">
               <a:solidFill>
                 <a:srgbClr val="000000"/>
               </a:solidFill>
@@ -12549,7 +12419,7 @@
             </a:endParaRPr>
           </a:p>
           <a:p>
-            <a:pPr indent="-323850" lvl="0" marL="457200" rtl="0" algn="l">
+            <a:pPr indent="-311150" lvl="0" marL="457200" rtl="0" algn="l">
               <a:spcBef>
                 <a:spcPts val="0"/>
               </a:spcBef>
@@ -12564,7 +12434,7 @@
               <a:buChar char="●"/>
             </a:pPr>
             <a:r>
-              <a:rPr lang="en" sz="6000">
+              <a:rPr lang="en" sz="5200">
                 <a:solidFill>
                   <a:srgbClr val="000000"/>
                 </a:solidFill>
@@ -12575,7 +12445,7 @@
               </a:rPr>
               <a:t>personalized adapters</a:t>
             </a:r>
-            <a:endParaRPr sz="6000">
+            <a:endParaRPr sz="5200">
               <a:solidFill>
                 <a:srgbClr val="000000"/>
               </a:solidFill>
@@ -12586,7 +12456,7 @@
             </a:endParaRPr>
           </a:p>
           <a:p>
-            <a:pPr indent="-323850" lvl="0" marL="457200" rtl="0" algn="l">
+            <a:pPr indent="-311150" lvl="0" marL="457200" rtl="0" algn="l">
               <a:spcBef>
                 <a:spcPts val="0"/>
               </a:spcBef>
@@ -12601,7 +12471,7 @@
               <a:buChar char="●"/>
             </a:pPr>
             <a:r>
-              <a:rPr lang="en" sz="6000">
+              <a:rPr lang="en" sz="5200">
                 <a:solidFill>
                   <a:srgbClr val="000000"/>
                 </a:solidFill>
@@ -12612,7 +12482,7 @@
               </a:rPr>
               <a:t>larger datasets</a:t>
             </a:r>
-            <a:endParaRPr sz="6000">
+            <a:endParaRPr sz="5200">
               <a:solidFill>
                 <a:srgbClr val="000000"/>
               </a:solidFill>
@@ -12623,7 +12493,7 @@
             </a:endParaRPr>
           </a:p>
           <a:p>
-            <a:pPr indent="-323850" lvl="0" marL="457200" rtl="0" algn="l">
+            <a:pPr indent="-311150" lvl="0" marL="457200" rtl="0" algn="l">
               <a:spcBef>
                 <a:spcPts val="0"/>
               </a:spcBef>
@@ -12638,7 +12508,7 @@
               <a:buChar char="●"/>
             </a:pPr>
             <a:r>
-              <a:rPr lang="en" sz="6000">
+              <a:rPr lang="en" sz="5200">
                 <a:solidFill>
                   <a:srgbClr val="000000"/>
                 </a:solidFill>
@@ -12649,7 +12519,7 @@
               </a:rPr>
               <a:t>better generation-quality metrics</a:t>
             </a:r>
-            <a:endParaRPr sz="6000">
+            <a:endParaRPr sz="5200">
               <a:solidFill>
                 <a:srgbClr val="000000"/>
               </a:solidFill>
@@ -13693,7 +13563,7 @@
         </p:nvSpPr>
         <p:spPr>
           <a:xfrm>
-            <a:off x="729450" y="2078875"/>
+            <a:off x="729450" y="1962600"/>
             <a:ext cx="7688700" cy="2689200"/>
           </a:xfrm>
           <a:prstGeom prst="rect">
@@ -14164,25 +14034,7 @@
                 <a:cs typeface="Raleway"/>
                 <a:sym typeface="Raleway"/>
               </a:rPr>
-              <a:t>Instead of updating full weight matrix </a:t>
-            </a:r>
-            <a:r>
-              <a:rPr lang="en" sz="6128">
-                <a:latin typeface="Raleway"/>
-                <a:ea typeface="Raleway"/>
-                <a:cs typeface="Raleway"/>
-                <a:sym typeface="Raleway"/>
-              </a:rPr>
-              <a:t>𝑊 </a:t>
-            </a:r>
-            <a:r>
-              <a:rPr lang="en" sz="6128">
-                <a:latin typeface="Raleway"/>
-                <a:ea typeface="Raleway"/>
-                <a:cs typeface="Raleway"/>
-                <a:sym typeface="Raleway"/>
-              </a:rPr>
-              <a:t>LoRA learns a low-rank update</a:t>
+              <a:t>Instead of updating full weight matrix 𝑊 LoRA learns a low-rank update</a:t>
             </a:r>
             <a:endParaRPr sz="6128">
               <a:latin typeface="Raleway"/>
@@ -14589,7 +14441,7 @@
         </p:nvSpPr>
         <p:spPr>
           <a:xfrm>
-            <a:off x="729450" y="1318650"/>
+            <a:off x="727650" y="611975"/>
             <a:ext cx="7688700" cy="535200"/>
           </a:xfrm>
           <a:prstGeom prst="rect">
@@ -14629,7 +14481,7 @@
         </p:nvSpPr>
         <p:spPr>
           <a:xfrm>
-            <a:off x="729450" y="1853850"/>
+            <a:off x="727650" y="1424475"/>
             <a:ext cx="8153100" cy="3064500"/>
           </a:xfrm>
           <a:prstGeom prst="rect">
@@ -15758,7 +15610,7 @@
                 <a:cs typeface="Raleway"/>
                 <a:sym typeface="Raleway"/>
               </a:rPr>
-              <a:t>IID Baseline — 4/8 clients per round, 6 rounds</a:t>
+              <a:t>IID Baseline  </a:t>
             </a:r>
             <a:endParaRPr sz="1517">
               <a:latin typeface="Raleway"/>
@@ -15789,7 +15641,7 @@
                 <a:cs typeface="Raleway"/>
                 <a:sym typeface="Raleway"/>
               </a:rPr>
-              <a:t>Non-IID Baseline — 4/8 clients per round, 6 rounds</a:t>
+              <a:t>Non-IID Baseline </a:t>
             </a:r>
             <a:endParaRPr sz="1517">
               <a:latin typeface="Raleway"/>
@@ -15820,7 +15672,7 @@
                 <a:cs typeface="Raleway"/>
                 <a:sym typeface="Raleway"/>
               </a:rPr>
-              <a:t>High Client Fraction — 6/8 clients per round, 6 rounds</a:t>
+              <a:t>High Client Fraction </a:t>
             </a:r>
             <a:endParaRPr sz="1517">
               <a:latin typeface="Raleway"/>
@@ -15851,7 +15703,7 @@
                 <a:cs typeface="Raleway"/>
                 <a:sym typeface="Raleway"/>
               </a:rPr>
-              <a:t>More Rounds — 4/8 clients per round, 10 rounds</a:t>
+              <a:t>More Rounds </a:t>
             </a:r>
             <a:endParaRPr sz="1517">
               <a:latin typeface="Raleway"/>
@@ -15894,6 +15746,285 @@
 </file>
 
 <file path=ppt/theme/theme1.xml><?xml version="1.0" encoding="utf-8"?>
+<a:theme xmlns:a="http://schemas.openxmlformats.org/drawingml/2006/main" xmlns:r="http://schemas.openxmlformats.org/officeDocument/2006/relationships">
+  <a:themeElements>
+    <a:clrScheme name="Default">
+      <a:dk1>
+        <a:srgbClr val="000000"/>
+      </a:dk1>
+      <a:lt1>
+        <a:srgbClr val="FFFFFF"/>
+      </a:lt1>
+      <a:dk2>
+        <a:srgbClr val="158158"/>
+      </a:dk2>
+      <a:lt2>
+        <a:srgbClr val="F3F3F3"/>
+      </a:lt2>
+      <a:accent1>
+        <a:srgbClr val="058DC7"/>
+      </a:accent1>
+      <a:accent2>
+        <a:srgbClr val="50B432"/>
+      </a:accent2>
+      <a:accent3>
+        <a:srgbClr val="ED561B"/>
+      </a:accent3>
+      <a:accent4>
+        <a:srgbClr val="EDEF00"/>
+      </a:accent4>
+      <a:accent5>
+        <a:srgbClr val="24CBE5"/>
+      </a:accent5>
+      <a:accent6>
+        <a:srgbClr val="64E572"/>
+      </a:accent6>
+      <a:hlink>
+        <a:srgbClr val="2200CC"/>
+      </a:hlink>
+      <a:folHlink>
+        <a:srgbClr val="551A8B"/>
+      </a:folHlink>
+    </a:clrScheme>
+    <a:fontScheme name="Office">
+      <a:majorFont>
+        <a:latin typeface="Arial"/>
+        <a:ea typeface=""/>
+        <a:cs typeface=""/>
+        <a:font script="Jpan" typeface="ＭＳ Ｐゴシック"/>
+        <a:font script="Hang" typeface="맑은 고딕"/>
+        <a:font script="Hans" typeface="宋体"/>
+        <a:font script="Hant" typeface="新細明體"/>
+        <a:font script="Arab" typeface="Times New Roman"/>
+        <a:font script="Hebr" typeface="Times New Roman"/>
+        <a:font script="Thai" typeface="Angsana New"/>
+        <a:font script="Ethi" typeface="Nyala"/>
+        <a:font script="Beng" typeface="Vrinda"/>
+        <a:font script="Gujr" typeface="Shruti"/>
+        <a:font script="Khmr" typeface="MoolBoran"/>
+        <a:font script="Knda" typeface="Tunga"/>
+        <a:font script="Guru" typeface="Raavi"/>
+        <a:font script="Cans" typeface="Euphemia"/>
+        <a:font script="Cher" typeface="Plantagenet Cherokee"/>
+        <a:font script="Yiii" typeface="Microsoft Yi Baiti"/>
+        <a:font script="Tibt" typeface="Microsoft Himalaya"/>
+        <a:font script="Thaa" typeface="MV Boli"/>
+        <a:font script="Deva" typeface="Mangal"/>
+        <a:font script="Telu" typeface="Gautami"/>
+        <a:font script="Taml" typeface="Latha"/>
+        <a:font script="Syrc" typeface="Estrangelo Edessa"/>
+        <a:font script="Orya" typeface="Kalinga"/>
+        <a:font script="Mlym" typeface="Kartika"/>
+        <a:font script="Laoo" typeface="DokChampa"/>
+        <a:font script="Sinh" typeface="Iskoola Pota"/>
+        <a:font script="Mong" typeface="Mongolian Baiti"/>
+        <a:font script="Viet" typeface="Times New Roman"/>
+        <a:font script="Uigh" typeface="Microsoft Uighur"/>
+        <a:font script="Geor" typeface="Sylfaen"/>
+      </a:majorFont>
+      <a:minorFont>
+        <a:latin typeface="Arial"/>
+        <a:ea typeface=""/>
+        <a:cs typeface=""/>
+        <a:font script="Jpan" typeface="ＭＳ Ｐゴシック"/>
+        <a:font script="Hang" typeface="맑은 고딕"/>
+        <a:font script="Hans" typeface="宋体"/>
+        <a:font script="Hant" typeface="新細明體"/>
+        <a:font script="Arab" typeface="Arial"/>
+        <a:font script="Hebr" typeface="Arial"/>
+        <a:font script="Thai" typeface="Cordia New"/>
+        <a:font script="Ethi" typeface="Nyala"/>
+        <a:font script="Beng" typeface="Vrinda"/>
+        <a:font script="Gujr" typeface="Shruti"/>
+        <a:font script="Khmr" typeface="DaunPenh"/>
+        <a:font script="Knda" typeface="Tunga"/>
+        <a:font script="Guru" typeface="Raavi"/>
+        <a:font script="Cans" typeface="Euphemia"/>
+        <a:font script="Cher" typeface="Plantagenet Cherokee"/>
+        <a:font script="Yiii" typeface="Microsoft Yi Baiti"/>
+        <a:font script="Tibt" typeface="Microsoft Himalaya"/>
+        <a:font script="Thaa" typeface="MV Boli"/>
+        <a:font script="Deva" typeface="Mangal"/>
+        <a:font script="Telu" typeface="Gautami"/>
+        <a:font script="Taml" typeface="Latha"/>
+        <a:font script="Syrc" typeface="Estrangelo Edessa"/>
+        <a:font script="Orya" typeface="Kalinga"/>
+        <a:font script="Mlym" typeface="Kartika"/>
+        <a:font script="Laoo" typeface="DokChampa"/>
+        <a:font script="Sinh" typeface="Iskoola Pota"/>
+        <a:font script="Mong" typeface="Mongolian Baiti"/>
+        <a:font script="Viet" typeface="Arial"/>
+        <a:font script="Uigh" typeface="Microsoft Uighur"/>
+        <a:font script="Geor" typeface="Sylfaen"/>
+      </a:minorFont>
+    </a:fontScheme>
+    <a:fmtScheme name="Office">
+      <a:fillStyleLst>
+        <a:solidFill>
+          <a:schemeClr val="phClr"/>
+        </a:solidFill>
+        <a:gradFill rotWithShape="1">
+          <a:gsLst>
+            <a:gs pos="0">
+              <a:schemeClr val="phClr">
+                <a:tint val="50000"/>
+                <a:satMod val="300000"/>
+              </a:schemeClr>
+            </a:gs>
+            <a:gs pos="35000">
+              <a:schemeClr val="phClr">
+                <a:tint val="37000"/>
+                <a:satMod val="300000"/>
+              </a:schemeClr>
+            </a:gs>
+            <a:gs pos="100000">
+              <a:schemeClr val="phClr">
+                <a:tint val="15000"/>
+                <a:satMod val="350000"/>
+              </a:schemeClr>
+            </a:gs>
+          </a:gsLst>
+          <a:lin ang="16200000" scaled="1"/>
+        </a:gradFill>
+        <a:gradFill rotWithShape="1">
+          <a:gsLst>
+            <a:gs pos="0">
+              <a:schemeClr val="phClr">
+                <a:tint val="100000"/>
+                <a:shade val="100000"/>
+                <a:satMod val="130000"/>
+              </a:schemeClr>
+            </a:gs>
+            <a:gs pos="100000">
+              <a:schemeClr val="phClr">
+                <a:tint val="50000"/>
+                <a:shade val="100000"/>
+                <a:satMod val="350000"/>
+              </a:schemeClr>
+            </a:gs>
+          </a:gsLst>
+          <a:lin ang="16200000" scaled="0"/>
+        </a:gradFill>
+      </a:fillStyleLst>
+      <a:lnStyleLst>
+        <a:ln w="9525" cap="flat" cmpd="sng" algn="ctr">
+          <a:solidFill>
+            <a:schemeClr val="phClr">
+              <a:shade val="95000"/>
+              <a:satMod val="105000"/>
+            </a:schemeClr>
+          </a:solidFill>
+          <a:prstDash val="solid"/>
+        </a:ln>
+        <a:ln w="25400" cap="flat" cmpd="sng" algn="ctr">
+          <a:solidFill>
+            <a:schemeClr val="phClr"/>
+          </a:solidFill>
+          <a:prstDash val="solid"/>
+        </a:ln>
+        <a:ln w="38100" cap="flat" cmpd="sng" algn="ctr">
+          <a:solidFill>
+            <a:schemeClr val="phClr"/>
+          </a:solidFill>
+          <a:prstDash val="solid"/>
+        </a:ln>
+      </a:lnStyleLst>
+      <a:effectStyleLst>
+        <a:effectStyle>
+          <a:effectLst>
+            <a:outerShdw blurRad="40000" dist="20000" dir="5400000" rotWithShape="0">
+              <a:srgbClr val="000000">
+                <a:alpha val="38000"/>
+              </a:srgbClr>
+            </a:outerShdw>
+          </a:effectLst>
+        </a:effectStyle>
+        <a:effectStyle>
+          <a:effectLst>
+            <a:outerShdw blurRad="40000" dist="23000" dir="5400000" rotWithShape="0">
+              <a:srgbClr val="000000">
+                <a:alpha val="35000"/>
+              </a:srgbClr>
+            </a:outerShdw>
+          </a:effectLst>
+        </a:effectStyle>
+        <a:effectStyle>
+          <a:effectLst>
+            <a:outerShdw blurRad="40000" dist="23000" dir="5400000" rotWithShape="0">
+              <a:srgbClr val="000000">
+                <a:alpha val="35000"/>
+              </a:srgbClr>
+            </a:outerShdw>
+          </a:effectLst>
+          <a:scene3d>
+            <a:camera prst="orthographicFront">
+              <a:rot lat="0" lon="0" rev="0"/>
+            </a:camera>
+            <a:lightRig rig="threePt" dir="t">
+              <a:rot lat="0" lon="0" rev="1200000"/>
+            </a:lightRig>
+          </a:scene3d>
+          <a:sp3d>
+            <a:bevelT w="63500" h="25400"/>
+          </a:sp3d>
+        </a:effectStyle>
+      </a:effectStyleLst>
+      <a:bgFillStyleLst>
+        <a:solidFill>
+          <a:schemeClr val="phClr"/>
+        </a:solidFill>
+        <a:gradFill rotWithShape="1">
+          <a:gsLst>
+            <a:gs pos="0">
+              <a:schemeClr val="phClr">
+                <a:tint val="40000"/>
+                <a:satMod val="350000"/>
+              </a:schemeClr>
+            </a:gs>
+            <a:gs pos="40000">
+              <a:schemeClr val="phClr">
+                <a:tint val="45000"/>
+                <a:shade val="99000"/>
+                <a:satMod val="350000"/>
+              </a:schemeClr>
+            </a:gs>
+            <a:gs pos="100000">
+              <a:schemeClr val="phClr">
+                <a:shade val="20000"/>
+                <a:satMod val="255000"/>
+              </a:schemeClr>
+            </a:gs>
+          </a:gsLst>
+          <a:path path="circle">
+            <a:fillToRect l="50000" t="-80000" r="50000" b="180000"/>
+          </a:path>
+        </a:gradFill>
+        <a:gradFill rotWithShape="1">
+          <a:gsLst>
+            <a:gs pos="0">
+              <a:schemeClr val="phClr">
+                <a:tint val="80000"/>
+                <a:satMod val="300000"/>
+              </a:schemeClr>
+            </a:gs>
+            <a:gs pos="100000">
+              <a:schemeClr val="phClr">
+                <a:shade val="30000"/>
+                <a:satMod val="200000"/>
+              </a:schemeClr>
+            </a:gs>
+          </a:gsLst>
+          <a:path path="circle">
+            <a:fillToRect l="50000" t="50000" r="50000" b="50000"/>
+          </a:path>
+        </a:gradFill>
+      </a:bgFillStyleLst>
+    </a:fmtScheme>
+  </a:themeElements>
+</a:theme>
+</file>
+
+<file path=ppt/theme/theme2.xml><?xml version="1.0" encoding="utf-8"?>
 <a:theme xmlns:a="http://schemas.openxmlformats.org/drawingml/2006/main" xmlns:r="http://schemas.openxmlformats.org/officeDocument/2006/relationships" name="Streamline">
   <a:themeElements>
     <a:clrScheme name="Streamline">
@@ -16170,283 +16301,4 @@
     </a:fmtScheme>
   </a:themeElements>
 </a:theme>
-</file>
-
-<file path=ppt/theme/theme2.xml><?xml version="1.0" encoding="utf-8"?>
-<a:theme xmlns:a="http://schemas.openxmlformats.org/drawingml/2006/main" xmlns:r="http://schemas.openxmlformats.org/officeDocument/2006/relationships">
-  <a:themeElements>
-    <a:clrScheme name="Default">
-      <a:dk1>
-        <a:srgbClr val="000000"/>
-      </a:dk1>
-      <a:lt1>
-        <a:srgbClr val="FFFFFF"/>
-      </a:lt1>
-      <a:dk2>
-        <a:srgbClr val="158158"/>
-      </a:dk2>
-      <a:lt2>
-        <a:srgbClr val="F3F3F3"/>
-      </a:lt2>
-      <a:accent1>
-        <a:srgbClr val="058DC7"/>
-      </a:accent1>
-      <a:accent2>
-        <a:srgbClr val="50B432"/>
-      </a:accent2>
-      <a:accent3>
-        <a:srgbClr val="ED561B"/>
-      </a:accent3>
-      <a:accent4>
-        <a:srgbClr val="EDEF00"/>
-      </a:accent4>
-      <a:accent5>
-        <a:srgbClr val="24CBE5"/>
-      </a:accent5>
-      <a:accent6>
-        <a:srgbClr val="64E572"/>
-      </a:accent6>
-      <a:hlink>
-        <a:srgbClr val="2200CC"/>
-      </a:hlink>
-      <a:folHlink>
-        <a:srgbClr val="551A8B"/>
-      </a:folHlink>
-    </a:clrScheme>
-    <a:fontScheme name="Office">
-      <a:majorFont>
-        <a:latin typeface="Arial"/>
-        <a:ea typeface=""/>
-        <a:cs typeface=""/>
-        <a:font script="Jpan" typeface="ＭＳ Ｐゴシック"/>
-        <a:font script="Hang" typeface="맑은 고딕"/>
-        <a:font script="Hans" typeface="宋体"/>
-        <a:font script="Hant" typeface="新細明體"/>
-        <a:font script="Arab" typeface="Times New Roman"/>
-        <a:font script="Hebr" typeface="Times New Roman"/>
-        <a:font script="Thai" typeface="Angsana New"/>
-        <a:font script="Ethi" typeface="Nyala"/>
-        <a:font script="Beng" typeface="Vrinda"/>
-        <a:font script="Gujr" typeface="Shruti"/>
-        <a:font script="Khmr" typeface="MoolBoran"/>
-        <a:font script="Knda" typeface="Tunga"/>
-        <a:font script="Guru" typeface="Raavi"/>
-        <a:font script="Cans" typeface="Euphemia"/>
-        <a:font script="Cher" typeface="Plantagenet Cherokee"/>
-        <a:font script="Yiii" typeface="Microsoft Yi Baiti"/>
-        <a:font script="Tibt" typeface="Microsoft Himalaya"/>
-        <a:font script="Thaa" typeface="MV Boli"/>
-        <a:font script="Deva" typeface="Mangal"/>
-        <a:font script="Telu" typeface="Gautami"/>
-        <a:font script="Taml" typeface="Latha"/>
-        <a:font script="Syrc" typeface="Estrangelo Edessa"/>
-        <a:font script="Orya" typeface="Kalinga"/>
-        <a:font script="Mlym" typeface="Kartika"/>
-        <a:font script="Laoo" typeface="DokChampa"/>
-        <a:font script="Sinh" typeface="Iskoola Pota"/>
-        <a:font script="Mong" typeface="Mongolian Baiti"/>
-        <a:font script="Viet" typeface="Times New Roman"/>
-        <a:font script="Uigh" typeface="Microsoft Uighur"/>
-        <a:font script="Geor" typeface="Sylfaen"/>
-      </a:majorFont>
-      <a:minorFont>
-        <a:latin typeface="Arial"/>
-        <a:ea typeface=""/>
-        <a:cs typeface=""/>
-        <a:font script="Jpan" typeface="ＭＳ Ｐゴシック"/>
-        <a:font script="Hang" typeface="맑은 고딕"/>
-        <a:font script="Hans" typeface="宋体"/>
-        <a:font script="Hant" typeface="新細明體"/>
-        <a:font script="Arab" typeface="Arial"/>
-        <a:font script="Hebr" typeface="Arial"/>
-        <a:font script="Thai" typeface="Cordia New"/>
-        <a:font script="Ethi" typeface="Nyala"/>
-        <a:font script="Beng" typeface="Vrinda"/>
-        <a:font script="Gujr" typeface="Shruti"/>
-        <a:font script="Khmr" typeface="DaunPenh"/>
-        <a:font script="Knda" typeface="Tunga"/>
-        <a:font script="Guru" typeface="Raavi"/>
-        <a:font script="Cans" typeface="Euphemia"/>
-        <a:font script="Cher" typeface="Plantagenet Cherokee"/>
-        <a:font script="Yiii" typeface="Microsoft Yi Baiti"/>
-        <a:font script="Tibt" typeface="Microsoft Himalaya"/>
-        <a:font script="Thaa" typeface="MV Boli"/>
-        <a:font script="Deva" typeface="Mangal"/>
-        <a:font script="Telu" typeface="Gautami"/>
-        <a:font script="Taml" typeface="Latha"/>
-        <a:font script="Syrc" typeface="Estrangelo Edessa"/>
-        <a:font script="Orya" typeface="Kalinga"/>
-        <a:font script="Mlym" typeface="Kartika"/>
-        <a:font script="Laoo" typeface="DokChampa"/>
-        <a:font script="Sinh" typeface="Iskoola Pota"/>
-        <a:font script="Mong" typeface="Mongolian Baiti"/>
-        <a:font script="Viet" typeface="Arial"/>
-        <a:font script="Uigh" typeface="Microsoft Uighur"/>
-        <a:font script="Geor" typeface="Sylfaen"/>
-      </a:minorFont>
-    </a:fontScheme>
-    <a:fmtScheme name="Office">
-      <a:fillStyleLst>
-        <a:solidFill>
-          <a:schemeClr val="phClr"/>
-        </a:solidFill>
-        <a:gradFill rotWithShape="1">
-          <a:gsLst>
-            <a:gs pos="0">
-              <a:schemeClr val="phClr">
-                <a:tint val="50000"/>
-                <a:satMod val="300000"/>
-              </a:schemeClr>
-            </a:gs>
-            <a:gs pos="35000">
-              <a:schemeClr val="phClr">
-                <a:tint val="37000"/>
-                <a:satMod val="300000"/>
-              </a:schemeClr>
-            </a:gs>
-            <a:gs pos="100000">
-              <a:schemeClr val="phClr">
-                <a:tint val="15000"/>
-                <a:satMod val="350000"/>
-              </a:schemeClr>
-            </a:gs>
-          </a:gsLst>
-          <a:lin ang="16200000" scaled="1"/>
-        </a:gradFill>
-        <a:gradFill rotWithShape="1">
-          <a:gsLst>
-            <a:gs pos="0">
-              <a:schemeClr val="phClr">
-                <a:tint val="100000"/>
-                <a:shade val="100000"/>
-                <a:satMod val="130000"/>
-              </a:schemeClr>
-            </a:gs>
-            <a:gs pos="100000">
-              <a:schemeClr val="phClr">
-                <a:tint val="50000"/>
-                <a:shade val="100000"/>
-                <a:satMod val="350000"/>
-              </a:schemeClr>
-            </a:gs>
-          </a:gsLst>
-          <a:lin ang="16200000" scaled="0"/>
-        </a:gradFill>
-      </a:fillStyleLst>
-      <a:lnStyleLst>
-        <a:ln w="9525" cap="flat" cmpd="sng" algn="ctr">
-          <a:solidFill>
-            <a:schemeClr val="phClr">
-              <a:shade val="95000"/>
-              <a:satMod val="105000"/>
-            </a:schemeClr>
-          </a:solidFill>
-          <a:prstDash val="solid"/>
-        </a:ln>
-        <a:ln w="25400" cap="flat" cmpd="sng" algn="ctr">
-          <a:solidFill>
-            <a:schemeClr val="phClr"/>
-          </a:solidFill>
-          <a:prstDash val="solid"/>
-        </a:ln>
-        <a:ln w="38100" cap="flat" cmpd="sng" algn="ctr">
-          <a:solidFill>
-            <a:schemeClr val="phClr"/>
-          </a:solidFill>
-          <a:prstDash val="solid"/>
-        </a:ln>
-      </a:lnStyleLst>
-      <a:effectStyleLst>
-        <a:effectStyle>
-          <a:effectLst>
-            <a:outerShdw blurRad="40000" dist="20000" dir="5400000" rotWithShape="0">
-              <a:srgbClr val="000000">
-                <a:alpha val="38000"/>
-              </a:srgbClr>
-            </a:outerShdw>
-          </a:effectLst>
-        </a:effectStyle>
-        <a:effectStyle>
-          <a:effectLst>
-            <a:outerShdw blurRad="40000" dist="23000" dir="5400000" rotWithShape="0">
-              <a:srgbClr val="000000">
-                <a:alpha val="35000"/>
-              </a:srgbClr>
-            </a:outerShdw>
-          </a:effectLst>
-        </a:effectStyle>
-        <a:effectStyle>
-          <a:effectLst>
-            <a:outerShdw blurRad="40000" dist="23000" dir="5400000" rotWithShape="0">
-              <a:srgbClr val="000000">
-                <a:alpha val="35000"/>
-              </a:srgbClr>
-            </a:outerShdw>
-          </a:effectLst>
-          <a:scene3d>
-            <a:camera prst="orthographicFront">
-              <a:rot lat="0" lon="0" rev="0"/>
-            </a:camera>
-            <a:lightRig rig="threePt" dir="t">
-              <a:rot lat="0" lon="0" rev="1200000"/>
-            </a:lightRig>
-          </a:scene3d>
-          <a:sp3d>
-            <a:bevelT w="63500" h="25400"/>
-          </a:sp3d>
-        </a:effectStyle>
-      </a:effectStyleLst>
-      <a:bgFillStyleLst>
-        <a:solidFill>
-          <a:schemeClr val="phClr"/>
-        </a:solidFill>
-        <a:gradFill rotWithShape="1">
-          <a:gsLst>
-            <a:gs pos="0">
-              <a:schemeClr val="phClr">
-                <a:tint val="40000"/>
-                <a:satMod val="350000"/>
-              </a:schemeClr>
-            </a:gs>
-            <a:gs pos="40000">
-              <a:schemeClr val="phClr">
-                <a:tint val="45000"/>
-                <a:shade val="99000"/>
-                <a:satMod val="350000"/>
-              </a:schemeClr>
-            </a:gs>
-            <a:gs pos="100000">
-              <a:schemeClr val="phClr">
-                <a:shade val="20000"/>
-                <a:satMod val="255000"/>
-              </a:schemeClr>
-            </a:gs>
-          </a:gsLst>
-          <a:path path="circle">
-            <a:fillToRect l="50000" t="-80000" r="50000" b="180000"/>
-          </a:path>
-        </a:gradFill>
-        <a:gradFill rotWithShape="1">
-          <a:gsLst>
-            <a:gs pos="0">
-              <a:schemeClr val="phClr">
-                <a:tint val="80000"/>
-                <a:satMod val="300000"/>
-              </a:schemeClr>
-            </a:gs>
-            <a:gs pos="100000">
-              <a:schemeClr val="phClr">
-                <a:shade val="30000"/>
-                <a:satMod val="200000"/>
-              </a:schemeClr>
-            </a:gs>
-          </a:gsLst>
-          <a:path path="circle">
-            <a:fillToRect l="50000" t="50000" r="50000" b="50000"/>
-          </a:path>
-        </a:gradFill>
-      </a:bgFillStyleLst>
-    </a:fmtScheme>
-  </a:themeElements>
-</a:theme>
 </file>